--- a/documentation/posters/Smart_UTM_progress_A4.pptx
+++ b/documentation/posters/Smart_UTM_progress_A4.pptx
@@ -3731,7 +3731,7 @@
                 </a:solidFill>
                 <a:latin typeface="Calibri"/>
               </a:rPr>
-              <a:t>13</a:t>
+              <a:t>29</a:t>
             </a:r>
           </a:p>
         </p:txBody>
@@ -3792,7 +3792,7 @@
                 </a:solidFill>
                 <a:latin typeface="Calibri"/>
               </a:rPr>
-              <a:t>17 indexed runs</a:t>
+              <a:t>34 indexed runs</a:t>
             </a:r>
           </a:p>
         </p:txBody>
@@ -4107,7 +4107,7 @@
         </p:nvSpPr>
         <p:spPr>
           <a:xfrm>
-            <a:off x="310896" y="10208440"/>
+            <a:off x="310896" y="10125229"/>
             <a:ext cx="6940296" cy="4440"/>
           </a:xfrm>
           <a:prstGeom prst="rect">
@@ -4151,8 +4151,8 @@
         </p:nvSpPr>
         <p:spPr>
           <a:xfrm>
-            <a:off x="310896" y="10244983"/>
-            <a:ext cx="6940296" cy="133456"/>
+            <a:off x="310896" y="10161772"/>
+            <a:ext cx="6940296" cy="216667"/>
           </a:xfrm>
           <a:prstGeom prst="rect">
             <a:avLst/>
@@ -4180,7 +4180,7 @@
                 </a:solidFill>
                 <a:latin typeface="Calibri"/>
               </a:rPr>
-              <a:t>Every number on this page is recomputed from the rig CSVs by documentation/sf9_data.py and the test registry — nothing is transcribed by hand. Full detail: the 76-slide technical deck in documentation/, and ROADMAP.md for the complete task list.</a:t>
+              <a:t>Every number on this page is recomputed from the rig CSVs by documentation/scripts/sf9_data.py and the test registry — nothing is transcribed by hand. Full detail: the 76-slide technical deck in documentation/, and ROADMAP.md for the complete task list.</a:t>
             </a:r>
           </a:p>
         </p:txBody>
@@ -5883,7 +5883,7 @@
         </p:nvSpPr>
         <p:spPr>
           <a:xfrm>
-            <a:off x="310896" y="7823186"/>
+            <a:off x="3881628" y="2113716"/>
             <a:ext cx="3369564" cy="168249"/>
           </a:xfrm>
           <a:prstGeom prst="rect">
@@ -5925,7 +5925,7 @@
         </p:nvSpPr>
         <p:spPr>
           <a:xfrm>
-            <a:off x="310896" y="8014275"/>
+            <a:off x="3881628" y="2304805"/>
             <a:ext cx="3369564" cy="7613"/>
           </a:xfrm>
           <a:prstGeom prst="rect">
@@ -5969,7 +5969,7 @@
         </p:nvSpPr>
         <p:spPr>
           <a:xfrm>
-            <a:off x="310896" y="8059954"/>
+            <a:off x="3881628" y="2350484"/>
             <a:ext cx="3369564" cy="126187"/>
           </a:xfrm>
           <a:prstGeom prst="rect">
@@ -6011,7 +6011,7 @@
         </p:nvSpPr>
         <p:spPr>
           <a:xfrm>
-            <a:off x="310896" y="8197560"/>
+            <a:off x="3881628" y="2488090"/>
             <a:ext cx="3369564" cy="329184"/>
           </a:xfrm>
           <a:prstGeom prst="rect">
@@ -6053,7 +6053,7 @@
         </p:nvSpPr>
         <p:spPr>
           <a:xfrm>
-            <a:off x="310896" y="8572423"/>
+            <a:off x="3881628" y="2862953"/>
             <a:ext cx="3369564" cy="126187"/>
           </a:xfrm>
           <a:prstGeom prst="rect">
@@ -6095,7 +6095,7 @@
         </p:nvSpPr>
         <p:spPr>
           <a:xfrm>
-            <a:off x="310896" y="8710030"/>
+            <a:off x="3881628" y="3000560"/>
             <a:ext cx="3369564" cy="329184"/>
           </a:xfrm>
           <a:prstGeom prst="rect">
@@ -6137,7 +6137,7 @@
         </p:nvSpPr>
         <p:spPr>
           <a:xfrm>
-            <a:off x="310896" y="9084892"/>
+            <a:off x="3881628" y="3375422"/>
             <a:ext cx="3369564" cy="126187"/>
           </a:xfrm>
           <a:prstGeom prst="rect">
@@ -6179,7 +6179,7 @@
         </p:nvSpPr>
         <p:spPr>
           <a:xfrm>
-            <a:off x="310896" y="9222499"/>
+            <a:off x="3881628" y="3513029"/>
             <a:ext cx="3369564" cy="329184"/>
           </a:xfrm>
           <a:prstGeom prst="rect">
@@ -6221,7 +6221,7 @@
         </p:nvSpPr>
         <p:spPr>
           <a:xfrm>
-            <a:off x="310896" y="9597362"/>
+            <a:off x="3881628" y="3887892"/>
             <a:ext cx="3369564" cy="126187"/>
           </a:xfrm>
           <a:prstGeom prst="rect">
@@ -6263,7 +6263,7 @@
         </p:nvSpPr>
         <p:spPr>
           <a:xfrm>
-            <a:off x="310896" y="9734969"/>
+            <a:off x="3881628" y="4025499"/>
             <a:ext cx="3369564" cy="219456"/>
           </a:xfrm>
           <a:prstGeom prst="rect">
@@ -6305,7 +6305,7 @@
         </p:nvSpPr>
         <p:spPr>
           <a:xfrm>
-            <a:off x="3881628" y="2113716"/>
+            <a:off x="3881628" y="4391126"/>
             <a:ext cx="3369564" cy="2018363"/>
           </a:xfrm>
           <a:prstGeom prst="roundRect">
@@ -6353,7 +6353,7 @@
         </p:nvSpPr>
         <p:spPr>
           <a:xfrm>
-            <a:off x="3931874" y="2163963"/>
+            <a:off x="3931874" y="4441373"/>
             <a:ext cx="3269071" cy="126187"/>
           </a:xfrm>
           <a:prstGeom prst="rect">
@@ -6403,7 +6403,7 @@
         </p:blipFill>
         <p:spPr>
           <a:xfrm>
-            <a:off x="3931874" y="2317557"/>
+            <a:off x="3931874" y="4594967"/>
             <a:ext cx="3269071" cy="1293389"/>
           </a:xfrm>
           <a:prstGeom prst="rect">
@@ -6419,7 +6419,7 @@
         </p:nvSpPr>
         <p:spPr>
           <a:xfrm>
-            <a:off x="3931874" y="3642921"/>
+            <a:off x="3931874" y="5920331"/>
             <a:ext cx="3269071" cy="438912"/>
           </a:xfrm>
           <a:prstGeom prst="rect">
@@ -6461,7 +6461,7 @@
         </p:nvSpPr>
         <p:spPr>
           <a:xfrm>
-            <a:off x="3881628" y="4209733"/>
+            <a:off x="3881628" y="6487143"/>
             <a:ext cx="3369564" cy="168249"/>
           </a:xfrm>
           <a:prstGeom prst="rect">
@@ -6503,7 +6503,7 @@
         </p:nvSpPr>
         <p:spPr>
           <a:xfrm>
-            <a:off x="3881628" y="4400822"/>
+            <a:off x="3881628" y="6678232"/>
             <a:ext cx="3369564" cy="7613"/>
           </a:xfrm>
           <a:prstGeom prst="rect">
@@ -6547,7 +6547,7 @@
         </p:nvSpPr>
         <p:spPr>
           <a:xfrm>
-            <a:off x="3881628" y="4446501"/>
+            <a:off x="3881628" y="6723911"/>
             <a:ext cx="3369564" cy="866240"/>
           </a:xfrm>
           <a:prstGeom prst="roundRect">
@@ -6595,7 +6595,7 @@
         </p:nvSpPr>
         <p:spPr>
           <a:xfrm>
-            <a:off x="3881628" y="4446501"/>
+            <a:off x="3881628" y="6723911"/>
             <a:ext cx="13703" cy="866240"/>
           </a:xfrm>
           <a:prstGeom prst="rect">
@@ -6639,7 +6639,7 @@
         </p:nvSpPr>
         <p:spPr>
           <a:xfrm>
-            <a:off x="3909035" y="4473908"/>
+            <a:off x="3909035" y="6751318"/>
             <a:ext cx="3314749" cy="126187"/>
           </a:xfrm>
           <a:prstGeom prst="rect">
@@ -6681,7 +6681,7 @@
         </p:nvSpPr>
         <p:spPr>
           <a:xfrm>
-            <a:off x="3909035" y="4613799"/>
+            <a:off x="3909035" y="6891209"/>
             <a:ext cx="3314749" cy="671535"/>
           </a:xfrm>
           <a:prstGeom prst="rect">
@@ -6750,7 +6750,7 @@
         </p:nvSpPr>
         <p:spPr>
           <a:xfrm>
-            <a:off x="3881628" y="5344716"/>
+            <a:off x="3881628" y="7622126"/>
             <a:ext cx="3369564" cy="642395"/>
           </a:xfrm>
           <a:prstGeom prst="roundRect">
@@ -6798,7 +6798,7 @@
         </p:nvSpPr>
         <p:spPr>
           <a:xfrm>
-            <a:off x="3881628" y="5344716"/>
+            <a:off x="3881628" y="7622126"/>
             <a:ext cx="13703" cy="642395"/>
           </a:xfrm>
           <a:prstGeom prst="rect">
@@ -6842,7 +6842,7 @@
         </p:nvSpPr>
         <p:spPr>
           <a:xfrm>
-            <a:off x="3909035" y="5372123"/>
+            <a:off x="3909035" y="7649533"/>
             <a:ext cx="3314749" cy="126187"/>
           </a:xfrm>
           <a:prstGeom prst="rect">
@@ -6884,7 +6884,7 @@
         </p:nvSpPr>
         <p:spPr>
           <a:xfrm>
-            <a:off x="3909035" y="5512014"/>
+            <a:off x="3909035" y="7789424"/>
             <a:ext cx="3314749" cy="447690"/>
           </a:xfrm>
           <a:prstGeom prst="rect">
@@ -6944,7 +6944,7 @@
         </p:nvSpPr>
         <p:spPr>
           <a:xfrm>
-            <a:off x="3881628" y="6019086"/>
+            <a:off x="3881628" y="8296496"/>
             <a:ext cx="3369564" cy="530472"/>
           </a:xfrm>
           <a:prstGeom prst="roundRect">
@@ -6992,7 +6992,7 @@
         </p:nvSpPr>
         <p:spPr>
           <a:xfrm>
-            <a:off x="3881628" y="6019086"/>
+            <a:off x="3881628" y="8296496"/>
             <a:ext cx="13703" cy="530472"/>
           </a:xfrm>
           <a:prstGeom prst="rect">
@@ -7036,7 +7036,7 @@
         </p:nvSpPr>
         <p:spPr>
           <a:xfrm>
-            <a:off x="3909035" y="6046494"/>
+            <a:off x="3909035" y="8323904"/>
             <a:ext cx="3314749" cy="126187"/>
           </a:xfrm>
           <a:prstGeom prst="rect">
@@ -7078,7 +7078,7 @@
         </p:nvSpPr>
         <p:spPr>
           <a:xfrm>
-            <a:off x="3909035" y="6186384"/>
+            <a:off x="3909035" y="8463794"/>
             <a:ext cx="3314749" cy="335767"/>
           </a:xfrm>
           <a:prstGeom prst="rect">
@@ -7138,7 +7138,7 @@
         </p:nvSpPr>
         <p:spPr>
           <a:xfrm>
-            <a:off x="3881628" y="6581534"/>
+            <a:off x="7452360" y="2113716"/>
             <a:ext cx="3369564" cy="168249"/>
           </a:xfrm>
           <a:prstGeom prst="rect">
@@ -7180,7 +7180,7 @@
         </p:nvSpPr>
         <p:spPr>
           <a:xfrm>
-            <a:off x="3881628" y="6772623"/>
+            <a:off x="7452360" y="2304805"/>
             <a:ext cx="3369564" cy="7613"/>
           </a:xfrm>
           <a:prstGeom prst="rect">
@@ -7224,7 +7224,7 @@
         </p:nvSpPr>
         <p:spPr>
           <a:xfrm>
-            <a:off x="3881628" y="6818302"/>
+            <a:off x="7452360" y="2350484"/>
             <a:ext cx="3369564" cy="382186"/>
           </a:xfrm>
           <a:prstGeom prst="roundRect">
@@ -7272,7 +7272,7 @@
         </p:nvSpPr>
         <p:spPr>
           <a:xfrm>
-            <a:off x="3899899" y="6836573"/>
+            <a:off x="7470631" y="2368755"/>
             <a:ext cx="216973" cy="194310"/>
           </a:xfrm>
           <a:prstGeom prst="roundRect">
@@ -7318,7 +7318,7 @@
         </p:nvSpPr>
         <p:spPr>
           <a:xfrm>
-            <a:off x="3899899" y="6861719"/>
+            <a:off x="7470631" y="2393901"/>
             <a:ext cx="216973" cy="148590"/>
           </a:xfrm>
           <a:prstGeom prst="rect">
@@ -7360,7 +7360,7 @@
         </p:nvSpPr>
         <p:spPr>
           <a:xfrm>
-            <a:off x="4139711" y="6836573"/>
+            <a:off x="7710443" y="2368755"/>
             <a:ext cx="3093208" cy="126187"/>
           </a:xfrm>
           <a:prstGeom prst="rect">
@@ -7402,7 +7402,7 @@
         </p:nvSpPr>
         <p:spPr>
           <a:xfrm>
-            <a:off x="4139711" y="6962760"/>
+            <a:off x="7710443" y="2494942"/>
             <a:ext cx="3093208" cy="219456"/>
           </a:xfrm>
           <a:prstGeom prst="rect">
@@ -7444,7 +7444,7 @@
         </p:nvSpPr>
         <p:spPr>
           <a:xfrm>
-            <a:off x="3881628" y="7223327"/>
+            <a:off x="7452360" y="2755509"/>
             <a:ext cx="3369564" cy="382186"/>
           </a:xfrm>
           <a:prstGeom prst="roundRect">
@@ -7492,7 +7492,7 @@
         </p:nvSpPr>
         <p:spPr>
           <a:xfrm>
-            <a:off x="3899899" y="7241598"/>
+            <a:off x="7470631" y="2773780"/>
             <a:ext cx="216973" cy="194310"/>
           </a:xfrm>
           <a:prstGeom prst="roundRect">
@@ -7538,7 +7538,7 @@
         </p:nvSpPr>
         <p:spPr>
           <a:xfrm>
-            <a:off x="3899899" y="7266744"/>
+            <a:off x="7470631" y="2798926"/>
             <a:ext cx="216973" cy="148590"/>
           </a:xfrm>
           <a:prstGeom prst="rect">
@@ -7580,7 +7580,7 @@
         </p:nvSpPr>
         <p:spPr>
           <a:xfrm>
-            <a:off x="4139711" y="7241598"/>
+            <a:off x="7710443" y="2773780"/>
             <a:ext cx="3093208" cy="126187"/>
           </a:xfrm>
           <a:prstGeom prst="rect">
@@ -7622,7 +7622,7 @@
         </p:nvSpPr>
         <p:spPr>
           <a:xfrm>
-            <a:off x="4139711" y="7367786"/>
+            <a:off x="7710443" y="2899968"/>
             <a:ext cx="3093208" cy="219456"/>
           </a:xfrm>
           <a:prstGeom prst="rect">
@@ -7664,7 +7664,7 @@
         </p:nvSpPr>
         <p:spPr>
           <a:xfrm>
-            <a:off x="3881628" y="7628352"/>
+            <a:off x="7452360" y="3160534"/>
             <a:ext cx="3369564" cy="272458"/>
           </a:xfrm>
           <a:prstGeom prst="roundRect">
@@ -7712,7 +7712,7 @@
         </p:nvSpPr>
         <p:spPr>
           <a:xfrm>
-            <a:off x="3899899" y="7646624"/>
+            <a:off x="7470631" y="3178806"/>
             <a:ext cx="216973" cy="194310"/>
           </a:xfrm>
           <a:prstGeom prst="roundRect">
@@ -7758,7 +7758,7 @@
         </p:nvSpPr>
         <p:spPr>
           <a:xfrm>
-            <a:off x="3899899" y="7671770"/>
+            <a:off x="7470631" y="3203952"/>
             <a:ext cx="216973" cy="148590"/>
           </a:xfrm>
           <a:prstGeom prst="rect">
@@ -7800,7 +7800,7 @@
         </p:nvSpPr>
         <p:spPr>
           <a:xfrm>
-            <a:off x="4139711" y="7646624"/>
+            <a:off x="7710443" y="3178806"/>
             <a:ext cx="3093208" cy="126187"/>
           </a:xfrm>
           <a:prstGeom prst="rect">
@@ -7842,7 +7842,7 @@
         </p:nvSpPr>
         <p:spPr>
           <a:xfrm>
-            <a:off x="4139711" y="7772811"/>
+            <a:off x="7710443" y="3304993"/>
             <a:ext cx="3093208" cy="109728"/>
           </a:xfrm>
           <a:prstGeom prst="rect">
@@ -7884,7 +7884,7 @@
         </p:nvSpPr>
         <p:spPr>
           <a:xfrm>
-            <a:off x="3881628" y="7923650"/>
+            <a:off x="7452360" y="3455832"/>
             <a:ext cx="3369564" cy="272458"/>
           </a:xfrm>
           <a:prstGeom prst="roundRect">
@@ -7932,7 +7932,7 @@
         </p:nvSpPr>
         <p:spPr>
           <a:xfrm>
-            <a:off x="3899899" y="7941921"/>
+            <a:off x="7470631" y="3474103"/>
             <a:ext cx="216973" cy="194310"/>
           </a:xfrm>
           <a:prstGeom prst="roundRect">
@@ -7978,7 +7978,7 @@
         </p:nvSpPr>
         <p:spPr>
           <a:xfrm>
-            <a:off x="3899899" y="7967067"/>
+            <a:off x="7470631" y="3499249"/>
             <a:ext cx="216973" cy="148590"/>
           </a:xfrm>
           <a:prstGeom prst="rect">
@@ -8020,7 +8020,7 @@
         </p:nvSpPr>
         <p:spPr>
           <a:xfrm>
-            <a:off x="4139711" y="7941921"/>
+            <a:off x="7710443" y="3474103"/>
             <a:ext cx="3093208" cy="126187"/>
           </a:xfrm>
           <a:prstGeom prst="rect">
@@ -8062,7 +8062,7 @@
         </p:nvSpPr>
         <p:spPr>
           <a:xfrm>
-            <a:off x="4139711" y="8068108"/>
+            <a:off x="7710443" y="3600290"/>
             <a:ext cx="3093208" cy="109728"/>
           </a:xfrm>
           <a:prstGeom prst="rect">
